--- a/clase_01_estrategia_transformacion/slides/slides_clase01.pptx
+++ b/clase_01_estrategia_transformacion/slides/slides_clase01.pptx
@@ -3160,14 +3160,14 @@
         </p:nvSpPr>
         <p:spPr>
           <a:xfrm>
-            <a:off x="0" y="5760720"/>
-            <a:ext cx="12188952" cy="1097280"/>
+            <a:off x="8074152" y="0"/>
+            <a:ext cx="4114800" cy="6858000"/>
           </a:xfrm>
           <a:prstGeom prst="rect">
             <a:avLst/>
           </a:prstGeom>
           <a:solidFill>
-            <a:srgbClr val="0099CC"/>
+            <a:srgbClr val="003C6B"/>
           </a:solidFill>
           <a:ln>
             <a:noFill/>
@@ -3204,7 +3204,7 @@
         <p:spPr>
           <a:xfrm>
             <a:off x="0" y="0"/>
-            <a:ext cx="12188952" cy="109728"/>
+            <a:ext cx="12188952" cy="91440"/>
           </a:xfrm>
           <a:prstGeom prst="rect">
             <a:avLst/>
@@ -3238,9 +3238,138 @@
           </a:p>
         </p:txBody>
       </p:sp>
+      <p:sp>
+        <p:nvSpPr>
+          <p:cNvPr id="5" name="Rectangle 4"/>
+          <p:cNvSpPr/>
+          <p:nvPr/>
+        </p:nvSpPr>
+        <p:spPr>
+          <a:xfrm>
+            <a:off x="0" y="6766560"/>
+            <a:ext cx="12188952" cy="91440"/>
+          </a:xfrm>
+          <a:prstGeom prst="rect">
+            <a:avLst/>
+          </a:prstGeom>
+          <a:solidFill>
+            <a:srgbClr val="D4A017"/>
+          </a:solidFill>
+          <a:ln>
+            <a:noFill/>
+          </a:ln>
+        </p:spPr>
+        <p:style>
+          <a:lnRef idx="1">
+            <a:schemeClr val="accent1"/>
+          </a:lnRef>
+          <a:fillRef idx="3">
+            <a:schemeClr val="accent1"/>
+          </a:fillRef>
+          <a:effectRef idx="2">
+            <a:schemeClr val="accent1"/>
+          </a:effectRef>
+          <a:fontRef idx="minor">
+            <a:schemeClr val="lt1"/>
+          </a:fontRef>
+        </p:style>
+        <p:txBody>
+          <a:bodyPr rtlCol="0" anchor="ctr"/>
+          <a:lstStyle/>
+          <a:p>
+            <a:pPr algn="ctr"/>
+          </a:p>
+        </p:txBody>
+      </p:sp>
+      <p:sp>
+        <p:nvSpPr>
+          <p:cNvPr id="6" name="Rectangle 5"/>
+          <p:cNvSpPr/>
+          <p:nvPr/>
+        </p:nvSpPr>
+        <p:spPr>
+          <a:xfrm>
+            <a:off x="0" y="5806440"/>
+            <a:ext cx="12188952" cy="960120"/>
+          </a:xfrm>
+          <a:prstGeom prst="rect">
+            <a:avLst/>
+          </a:prstGeom>
+          <a:solidFill>
+            <a:srgbClr val="000000"/>
+          </a:solidFill>
+          <a:ln>
+            <a:noFill/>
+          </a:ln>
+        </p:spPr>
+        <p:style>
+          <a:lnRef idx="1">
+            <a:schemeClr val="accent1"/>
+          </a:lnRef>
+          <a:fillRef idx="3">
+            <a:schemeClr val="accent1"/>
+          </a:fillRef>
+          <a:effectRef idx="2">
+            <a:schemeClr val="accent1"/>
+          </a:effectRef>
+          <a:fontRef idx="minor">
+            <a:schemeClr val="lt1"/>
+          </a:fontRef>
+        </p:style>
+        <p:txBody>
+          <a:bodyPr rtlCol="0" anchor="ctr"/>
+          <a:lstStyle/>
+          <a:p>
+            <a:pPr algn="ctr"/>
+          </a:p>
+        </p:txBody>
+      </p:sp>
+      <p:sp>
+        <p:nvSpPr>
+          <p:cNvPr id="7" name="Rectangle 6"/>
+          <p:cNvSpPr/>
+          <p:nvPr/>
+        </p:nvSpPr>
+        <p:spPr>
+          <a:xfrm>
+            <a:off x="0" y="5806440"/>
+            <a:ext cx="12188952" cy="960120"/>
+          </a:xfrm>
+          <a:prstGeom prst="rect">
+            <a:avLst/>
+          </a:prstGeom>
+          <a:solidFill>
+            <a:srgbClr val="005AA7"/>
+          </a:solidFill>
+          <a:ln>
+            <a:noFill/>
+          </a:ln>
+        </p:spPr>
+        <p:style>
+          <a:lnRef idx="1">
+            <a:schemeClr val="accent1"/>
+          </a:lnRef>
+          <a:fillRef idx="3">
+            <a:schemeClr val="accent1"/>
+          </a:fillRef>
+          <a:effectRef idx="2">
+            <a:schemeClr val="accent1"/>
+          </a:effectRef>
+          <a:fontRef idx="minor">
+            <a:schemeClr val="lt1"/>
+          </a:fontRef>
+        </p:style>
+        <p:txBody>
+          <a:bodyPr rtlCol="0" anchor="ctr"/>
+          <a:lstStyle/>
+          <a:p>
+            <a:pPr algn="ctr"/>
+          </a:p>
+        </p:txBody>
+      </p:sp>
       <p:pic>
         <p:nvPicPr>
-          <p:cNvPr id="5" name="Picture 4" descr="logo_utn_frch_negro.png"/>
+          <p:cNvPr id="8" name="Picture 7" descr="logo_utn_frch_negro.png"/>
           <p:cNvPicPr>
             <a:picLocks noChangeAspect="1"/>
           </p:cNvPicPr>
@@ -3254,102 +3383,72 @@
         </p:blipFill>
         <p:spPr>
           <a:xfrm>
-            <a:off x="411480" y="164592"/>
-            <a:ext cx="1452286" cy="777240"/>
+            <a:off x="365760" y="155448"/>
+            <a:ext cx="1366857" cy="731520"/>
           </a:xfrm>
           <a:prstGeom prst="rect">
             <a:avLst/>
           </a:prstGeom>
         </p:spPr>
       </p:pic>
-      <p:sp>
-        <p:nvSpPr>
-          <p:cNvPr id="6" name="Rectangle 5"/>
+      <p:pic>
+        <p:nvPicPr>
+          <p:cNvPr id="9" name="Picture 8" descr="logo_pesqueros_full.png"/>
+          <p:cNvPicPr>
+            <a:picLocks noChangeAspect="1"/>
+          </p:cNvPicPr>
+          <p:nvPr/>
+        </p:nvPicPr>
+        <p:blipFill>
+          <a:blip r:embed="rId3"/>
+          <a:stretch>
+            <a:fillRect/>
+          </a:stretch>
+        </p:blipFill>
+        <p:spPr>
+          <a:xfrm>
+            <a:off x="8897112" y="228600"/>
+            <a:ext cx="1981200" cy="594360"/>
+          </a:xfrm>
+          <a:prstGeom prst="rect">
+            <a:avLst/>
+          </a:prstGeom>
+        </p:spPr>
+      </p:pic>
+      <p:pic>
+        <p:nvPicPr>
+          <p:cNvPr id="10" name="Picture 9" descr="logo_ariel_symbol.png"/>
+          <p:cNvPicPr>
+            <a:picLocks noChangeAspect="1"/>
+          </p:cNvPicPr>
+          <p:nvPr/>
+        </p:nvPicPr>
+        <p:blipFill>
+          <a:blip r:embed="rId4"/>
+          <a:stretch>
+            <a:fillRect/>
+          </a:stretch>
+        </p:blipFill>
+        <p:spPr>
+          <a:xfrm>
+            <a:off x="11091672" y="228600"/>
+            <a:ext cx="1981200" cy="594360"/>
+          </a:xfrm>
+          <a:prstGeom prst="rect">
+            <a:avLst/>
+          </a:prstGeom>
+        </p:spPr>
+      </p:pic>
+      <p:sp>
+        <p:nvSpPr>
+          <p:cNvPr id="11" name="Rectangle 10"/>
           <p:cNvSpPr/>
           <p:nvPr/>
         </p:nvSpPr>
         <p:spPr>
           <a:xfrm>
-            <a:off x="10268712" y="164592"/>
-            <a:ext cx="1691640" cy="777240"/>
-          </a:xfrm>
-          <a:prstGeom prst="rect">
-            <a:avLst/>
-          </a:prstGeom>
-          <a:solidFill>
-            <a:srgbClr val="059669"/>
-          </a:solidFill>
-          <a:ln>
-            <a:noFill/>
-          </a:ln>
-        </p:spPr>
-        <p:style>
-          <a:lnRef idx="1">
-            <a:schemeClr val="accent1"/>
-          </a:lnRef>
-          <a:fillRef idx="3">
-            <a:schemeClr val="accent1"/>
-          </a:fillRef>
-          <a:effectRef idx="2">
-            <a:schemeClr val="accent1"/>
-          </a:effectRef>
-          <a:fontRef idx="minor">
-            <a:schemeClr val="lt1"/>
-          </a:fontRef>
-        </p:style>
-        <p:txBody>
-          <a:bodyPr rtlCol="0" anchor="ctr"/>
-          <a:lstStyle/>
-          <a:p>
-            <a:pPr algn="ctr"/>
-          </a:p>
-        </p:txBody>
-      </p:sp>
-      <p:sp>
-        <p:nvSpPr>
-          <p:cNvPr id="7" name="TextBox 6"/>
-          <p:cNvSpPr txBox="1"/>
-          <p:nvPr/>
-        </p:nvSpPr>
-        <p:spPr>
-          <a:xfrm>
-            <a:off x="10268712" y="164592"/>
-            <a:ext cx="1691640" cy="777240"/>
-          </a:xfrm>
-          <a:prstGeom prst="rect">
-            <a:avLst/>
-          </a:prstGeom>
-          <a:noFill/>
-        </p:spPr>
-        <p:txBody>
-          <a:bodyPr wrap="none">
-            <a:spAutoFit/>
-          </a:bodyPr>
-          <a:lstStyle/>
-          <a:p>
-            <a:pPr algn="ctr"/>
-            <a:r>
-              <a:rPr sz="900" b="1">
-                <a:solidFill>
-                  <a:srgbClr val="FFFFFF"/>
-                </a:solidFill>
-                <a:latin typeface="Calibri"/>
-              </a:rPr>
-              <a:t>PesquerosEnIA</a:t>
-            </a:r>
-          </a:p>
-        </p:txBody>
-      </p:sp>
-      <p:sp>
-        <p:nvSpPr>
-          <p:cNvPr id="8" name="Rectangle 7"/>
-          <p:cNvSpPr/>
-          <p:nvPr/>
-        </p:nvSpPr>
-        <p:spPr>
-          <a:xfrm>
-            <a:off x="411480" y="1234440"/>
-            <a:ext cx="11365992" cy="36576"/>
+            <a:off x="365760" y="1078992"/>
+            <a:ext cx="11457432" cy="32004"/>
           </a:xfrm>
           <a:prstGeom prst="rect">
             <a:avLst/>
@@ -3385,14 +3484,14 @@
       </p:sp>
       <p:sp>
         <p:nvSpPr>
-          <p:cNvPr id="9" name="TextBox 8"/>
+          <p:cNvPr id="12" name="TextBox 11"/>
           <p:cNvSpPr txBox="1"/>
           <p:nvPr/>
         </p:nvSpPr>
         <p:spPr>
           <a:xfrm>
-            <a:off x="411480" y="1417320"/>
-            <a:ext cx="4572000" cy="457200"/>
+            <a:off x="411480" y="1234440"/>
+            <a:ext cx="3657600" cy="384048"/>
           </a:xfrm>
           <a:prstGeom prst="rect">
             <a:avLst/>
@@ -3407,7 +3506,7 @@
           <a:p>
             <a:pPr algn="l"/>
             <a:r>
-              <a:rPr sz="1300" b="1" i="0">
+              <a:rPr sz="1200" b="1" i="0">
                 <a:solidFill>
                   <a:srgbClr val="0099CC"/>
                 </a:solidFill>
@@ -3420,14 +3519,14 @@
       </p:sp>
       <p:sp>
         <p:nvSpPr>
-          <p:cNvPr id="10" name="TextBox 9"/>
+          <p:cNvPr id="13" name="TextBox 12"/>
           <p:cNvSpPr txBox="1"/>
           <p:nvPr/>
         </p:nvSpPr>
         <p:spPr>
           <a:xfrm>
-            <a:off x="411480" y="1828800"/>
-            <a:ext cx="11365992" cy="2011680"/>
+            <a:off x="411480" y="1600200"/>
+            <a:ext cx="7434072" cy="2286000"/>
           </a:xfrm>
           <a:prstGeom prst="rect">
             <a:avLst/>
@@ -3442,7 +3541,7 @@
           <a:p>
             <a:pPr algn="l"/>
             <a:r>
-              <a:rPr sz="3600" b="1" i="0">
+              <a:rPr sz="3400" b="1" i="0">
                 <a:solidFill>
                   <a:srgbClr val="FFFFFF"/>
                 </a:solidFill>
@@ -3455,14 +3554,14 @@
       </p:sp>
       <p:sp>
         <p:nvSpPr>
-          <p:cNvPr id="11" name="TextBox 10"/>
+          <p:cNvPr id="14" name="TextBox 13"/>
           <p:cNvSpPr txBox="1"/>
           <p:nvPr/>
         </p:nvSpPr>
         <p:spPr>
           <a:xfrm>
-            <a:off x="411480" y="3749039"/>
-            <a:ext cx="11365992" cy="731520"/>
+            <a:off x="411480" y="3794760"/>
+            <a:ext cx="7434072" cy="685800"/>
           </a:xfrm>
           <a:prstGeom prst="rect">
             <a:avLst/>
@@ -3477,7 +3576,7 @@
           <a:p>
             <a:pPr algn="l"/>
             <a:r>
-              <a:rPr sz="1900" b="0" i="0">
+              <a:rPr sz="1700" b="0" i="0">
                 <a:solidFill>
                   <a:srgbClr val="0099CC"/>
                 </a:solidFill>
@@ -3490,14 +3589,14 @@
       </p:sp>
       <p:sp>
         <p:nvSpPr>
-          <p:cNvPr id="12" name="TextBox 11"/>
+          <p:cNvPr id="15" name="TextBox 14"/>
           <p:cNvSpPr txBox="1"/>
           <p:nvPr/>
         </p:nvSpPr>
         <p:spPr>
           <a:xfrm>
-            <a:off x="411480" y="5852160"/>
-            <a:ext cx="7315200" cy="457200"/>
+            <a:off x="8348472" y="2286000"/>
+            <a:ext cx="3474720" cy="914400"/>
           </a:xfrm>
           <a:prstGeom prst="rect">
             <a:avLst/>
@@ -3510,29 +3609,29 @@
           </a:bodyPr>
           <a:lstStyle/>
           <a:p>
-            <a:pPr algn="l"/>
-            <a:r>
-              <a:rPr sz="1400" b="0" i="0">
-                <a:solidFill>
-                  <a:srgbClr val="FFFFFF"/>
-                </a:solidFill>
-                <a:latin typeface="Calibri"/>
-              </a:rPr>
-              <a:t>Docentes: Ariel Giamportone · Soraya Corvalán</a:t>
-            </a:r>
-          </a:p>
-        </p:txBody>
-      </p:sp>
-      <p:sp>
-        <p:nvSpPr>
-          <p:cNvPr id="13" name="TextBox 12"/>
+            <a:pPr algn="ctr"/>
+            <a:r>
+              <a:rPr sz="2200" b="0" i="1">
+                <a:solidFill>
+                  <a:srgbClr val="B4D2F0"/>
+                </a:solidFill>
+                <a:latin typeface="Calibri"/>
+              </a:rPr>
+              <a:t>IA · Pesca · Datos</a:t>
+            </a:r>
+          </a:p>
+        </p:txBody>
+      </p:sp>
+      <p:sp>
+        <p:nvSpPr>
+          <p:cNvPr id="16" name="TextBox 15"/>
           <p:cNvSpPr txBox="1"/>
           <p:nvPr/>
         </p:nvSpPr>
         <p:spPr>
           <a:xfrm>
-            <a:off x="411480" y="6263640"/>
-            <a:ext cx="11365992" cy="457200"/>
+            <a:off x="8348472" y="3108960"/>
+            <a:ext cx="3474720" cy="548640"/>
           </a:xfrm>
           <a:prstGeom prst="rect">
             <a:avLst/>
@@ -3545,15 +3644,85 @@
           </a:bodyPr>
           <a:lstStyle/>
           <a:p>
+            <a:pPr algn="ctr"/>
+            <a:r>
+              <a:rPr sz="1300" b="0" i="0">
+                <a:solidFill>
+                  <a:srgbClr val="96BEE6"/>
+                </a:solidFill>
+                <a:latin typeface="Calibri"/>
+              </a:rPr>
+              <a:t>UTN FRCh + PesquerosEnIA</a:t>
+            </a:r>
+          </a:p>
+        </p:txBody>
+      </p:sp>
+      <p:sp>
+        <p:nvSpPr>
+          <p:cNvPr id="17" name="TextBox 16"/>
+          <p:cNvSpPr txBox="1"/>
+          <p:nvPr/>
+        </p:nvSpPr>
+        <p:spPr>
+          <a:xfrm>
+            <a:off x="411480" y="5897880"/>
+            <a:ext cx="8229600" cy="438912"/>
+          </a:xfrm>
+          <a:prstGeom prst="rect">
+            <a:avLst/>
+          </a:prstGeom>
+          <a:noFill/>
+        </p:spPr>
+        <p:txBody>
+          <a:bodyPr wrap="square">
+            <a:spAutoFit/>
+          </a:bodyPr>
+          <a:lstStyle/>
+          <a:p>
             <a:pPr algn="l"/>
             <a:r>
-              <a:rPr sz="1100" b="0" i="0">
-                <a:solidFill>
-                  <a:srgbClr val="C8E6FF"/>
-                </a:solidFill>
-                <a:latin typeface="Calibri"/>
-              </a:rPr>
-              <a:t>Inteligencia Artificial Aplicada a la Producción Pesquera · UTN FRCh · 2026</a:t>
+              <a:rPr sz="1400" b="1" i="0">
+                <a:solidFill>
+                  <a:srgbClr val="FFFFFF"/>
+                </a:solidFill>
+                <a:latin typeface="Calibri"/>
+              </a:rPr>
+              <a:t>Docentes: Ariel Giamportone · Soraya Corvalán</a:t>
+            </a:r>
+          </a:p>
+        </p:txBody>
+      </p:sp>
+      <p:sp>
+        <p:nvSpPr>
+          <p:cNvPr id="18" name="TextBox 17"/>
+          <p:cNvSpPr txBox="1"/>
+          <p:nvPr/>
+        </p:nvSpPr>
+        <p:spPr>
+          <a:xfrm>
+            <a:off x="411480" y="6309360"/>
+            <a:ext cx="11365992" cy="411480"/>
+          </a:xfrm>
+          <a:prstGeom prst="rect">
+            <a:avLst/>
+          </a:prstGeom>
+          <a:noFill/>
+        </p:spPr>
+        <p:txBody>
+          <a:bodyPr wrap="square">
+            <a:spAutoFit/>
+          </a:bodyPr>
+          <a:lstStyle/>
+          <a:p>
+            <a:pPr algn="l"/>
+            <a:r>
+              <a:rPr sz="1000" b="0" i="0">
+                <a:solidFill>
+                  <a:srgbClr val="BEDCFA"/>
+                </a:solidFill>
+                <a:latin typeface="Calibri"/>
+              </a:rPr>
+              <a:t>Inteligencia Artificial Aplicada a la Produccion Pesquera  |  UTN FRCh  |  2026</a:t>
             </a:r>
           </a:p>
         </p:txBody>
@@ -3958,8 +4127,8 @@
         </p:nvSpPr>
         <p:spPr>
           <a:xfrm>
-            <a:off x="0" y="6446520"/>
-            <a:ext cx="12188952" cy="411480"/>
+            <a:off x="0" y="6419088"/>
+            <a:ext cx="12188952" cy="438912"/>
           </a:xfrm>
           <a:prstGeom prst="rect">
             <a:avLst/>
@@ -3993,16 +4162,40 @@
           </a:p>
         </p:txBody>
       </p:sp>
-      <p:sp>
-        <p:nvSpPr>
-          <p:cNvPr id="9" name="TextBox 8"/>
+      <p:pic>
+        <p:nvPicPr>
+          <p:cNvPr id="9" name="Picture 8" descr="logo_pesqueros_symbol.png"/>
+          <p:cNvPicPr>
+            <a:picLocks noChangeAspect="1"/>
+          </p:cNvPicPr>
+          <p:nvPr/>
+        </p:nvPicPr>
+        <p:blipFill>
+          <a:blip r:embed="rId2"/>
+          <a:stretch>
+            <a:fillRect/>
+          </a:stretch>
+        </p:blipFill>
+        <p:spPr>
+          <a:xfrm>
+            <a:off x="137160" y="6455664"/>
+            <a:ext cx="347472" cy="347472"/>
+          </a:xfrm>
+          <a:prstGeom prst="rect">
+            <a:avLst/>
+          </a:prstGeom>
+        </p:spPr>
+      </p:pic>
+      <p:sp>
+        <p:nvSpPr>
+          <p:cNvPr id="10" name="TextBox 9"/>
           <p:cNvSpPr txBox="1"/>
           <p:nvPr/>
         </p:nvSpPr>
         <p:spPr>
           <a:xfrm>
-            <a:off x="274320" y="6473952"/>
-            <a:ext cx="11640312" cy="347472"/>
+            <a:off x="594360" y="6455664"/>
+            <a:ext cx="11457432" cy="347472"/>
           </a:xfrm>
           <a:prstGeom prst="rect">
             <a:avLst/>
@@ -4023,7 +4216,7 @@
                 </a:solidFill>
                 <a:latin typeface="Calibri"/>
               </a:rPr>
-              <a:t>Inteligencia Artificial Aplicada a la Producción Pesquera  ·  UTN FRCh  ·  PesquerosEnIA  ·  2026</a:t>
+              <a:t>IA Aplicada a la Produccion Pesquera  |  UTN FRCh  |  PesquerosEnIA  |  2026</a:t>
             </a:r>
           </a:p>
         </p:txBody>
@@ -4409,8 +4602,8 @@
         </p:nvSpPr>
         <p:spPr>
           <a:xfrm>
-            <a:off x="0" y="6446520"/>
-            <a:ext cx="12188952" cy="411480"/>
+            <a:off x="0" y="6419088"/>
+            <a:ext cx="12188952" cy="438912"/>
           </a:xfrm>
           <a:prstGeom prst="rect">
             <a:avLst/>
@@ -4444,16 +4637,40 @@
           </a:p>
         </p:txBody>
       </p:sp>
-      <p:sp>
-        <p:nvSpPr>
-          <p:cNvPr id="9" name="TextBox 8"/>
+      <p:pic>
+        <p:nvPicPr>
+          <p:cNvPr id="9" name="Picture 8" descr="logo_pesqueros_symbol.png"/>
+          <p:cNvPicPr>
+            <a:picLocks noChangeAspect="1"/>
+          </p:cNvPicPr>
+          <p:nvPr/>
+        </p:nvPicPr>
+        <p:blipFill>
+          <a:blip r:embed="rId2"/>
+          <a:stretch>
+            <a:fillRect/>
+          </a:stretch>
+        </p:blipFill>
+        <p:spPr>
+          <a:xfrm>
+            <a:off x="137160" y="6455664"/>
+            <a:ext cx="347472" cy="347472"/>
+          </a:xfrm>
+          <a:prstGeom prst="rect">
+            <a:avLst/>
+          </a:prstGeom>
+        </p:spPr>
+      </p:pic>
+      <p:sp>
+        <p:nvSpPr>
+          <p:cNvPr id="10" name="TextBox 9"/>
           <p:cNvSpPr txBox="1"/>
           <p:nvPr/>
         </p:nvSpPr>
         <p:spPr>
           <a:xfrm>
-            <a:off x="274320" y="6473952"/>
-            <a:ext cx="11640312" cy="347472"/>
+            <a:off x="594360" y="6455664"/>
+            <a:ext cx="11457432" cy="347472"/>
           </a:xfrm>
           <a:prstGeom prst="rect">
             <a:avLst/>
@@ -4474,7 +4691,7 @@
                 </a:solidFill>
                 <a:latin typeface="Calibri"/>
               </a:rPr>
-              <a:t>Inteligencia Artificial Aplicada a la Producción Pesquera  ·  UTN FRCh  ·  PesquerosEnIA  ·  2026</a:t>
+              <a:t>IA Aplicada a la Produccion Pesquera  |  UTN FRCh  |  PesquerosEnIA  |  2026</a:t>
             </a:r>
           </a:p>
         </p:txBody>
@@ -4917,8 +5134,8 @@
         </p:nvSpPr>
         <p:spPr>
           <a:xfrm>
-            <a:off x="0" y="6446520"/>
-            <a:ext cx="12188952" cy="411480"/>
+            <a:off x="0" y="6419088"/>
+            <a:ext cx="12188952" cy="438912"/>
           </a:xfrm>
           <a:prstGeom prst="rect">
             <a:avLst/>
@@ -4952,16 +5169,40 @@
           </a:p>
         </p:txBody>
       </p:sp>
-      <p:sp>
-        <p:nvSpPr>
-          <p:cNvPr id="9" name="TextBox 8"/>
+      <p:pic>
+        <p:nvPicPr>
+          <p:cNvPr id="9" name="Picture 8" descr="logo_pesqueros_symbol.png"/>
+          <p:cNvPicPr>
+            <a:picLocks noChangeAspect="1"/>
+          </p:cNvPicPr>
+          <p:nvPr/>
+        </p:nvPicPr>
+        <p:blipFill>
+          <a:blip r:embed="rId2"/>
+          <a:stretch>
+            <a:fillRect/>
+          </a:stretch>
+        </p:blipFill>
+        <p:spPr>
+          <a:xfrm>
+            <a:off x="137160" y="6455664"/>
+            <a:ext cx="347472" cy="347472"/>
+          </a:xfrm>
+          <a:prstGeom prst="rect">
+            <a:avLst/>
+          </a:prstGeom>
+        </p:spPr>
+      </p:pic>
+      <p:sp>
+        <p:nvSpPr>
+          <p:cNvPr id="10" name="TextBox 9"/>
           <p:cNvSpPr txBox="1"/>
           <p:nvPr/>
         </p:nvSpPr>
         <p:spPr>
           <a:xfrm>
-            <a:off x="274320" y="6473952"/>
-            <a:ext cx="11640312" cy="347472"/>
+            <a:off x="594360" y="6455664"/>
+            <a:ext cx="11457432" cy="347472"/>
           </a:xfrm>
           <a:prstGeom prst="rect">
             <a:avLst/>
@@ -4982,7 +5223,7 @@
                 </a:solidFill>
                 <a:latin typeface="Calibri"/>
               </a:rPr>
-              <a:t>Inteligencia Artificial Aplicada a la Producción Pesquera  ·  UTN FRCh  ·  PesquerosEnIA  ·  2026</a:t>
+              <a:t>IA Aplicada a la Produccion Pesquera  |  UTN FRCh  |  PesquerosEnIA  |  2026</a:t>
             </a:r>
           </a:p>
         </p:txBody>
@@ -5406,8 +5647,8 @@
         </p:nvSpPr>
         <p:spPr>
           <a:xfrm>
-            <a:off x="0" y="6446520"/>
-            <a:ext cx="12188952" cy="411480"/>
+            <a:off x="0" y="6419088"/>
+            <a:ext cx="12188952" cy="438912"/>
           </a:xfrm>
           <a:prstGeom prst="rect">
             <a:avLst/>
@@ -5441,16 +5682,40 @@
           </a:p>
         </p:txBody>
       </p:sp>
-      <p:sp>
-        <p:nvSpPr>
-          <p:cNvPr id="9" name="TextBox 8"/>
+      <p:pic>
+        <p:nvPicPr>
+          <p:cNvPr id="9" name="Picture 8" descr="logo_pesqueros_symbol.png"/>
+          <p:cNvPicPr>
+            <a:picLocks noChangeAspect="1"/>
+          </p:cNvPicPr>
+          <p:nvPr/>
+        </p:nvPicPr>
+        <p:blipFill>
+          <a:blip r:embed="rId2"/>
+          <a:stretch>
+            <a:fillRect/>
+          </a:stretch>
+        </p:blipFill>
+        <p:spPr>
+          <a:xfrm>
+            <a:off x="137160" y="6455664"/>
+            <a:ext cx="347472" cy="347472"/>
+          </a:xfrm>
+          <a:prstGeom prst="rect">
+            <a:avLst/>
+          </a:prstGeom>
+        </p:spPr>
+      </p:pic>
+      <p:sp>
+        <p:nvSpPr>
+          <p:cNvPr id="10" name="TextBox 9"/>
           <p:cNvSpPr txBox="1"/>
           <p:nvPr/>
         </p:nvSpPr>
         <p:spPr>
           <a:xfrm>
-            <a:off x="274320" y="6473952"/>
-            <a:ext cx="11640312" cy="347472"/>
+            <a:off x="594360" y="6455664"/>
+            <a:ext cx="11457432" cy="347472"/>
           </a:xfrm>
           <a:prstGeom prst="rect">
             <a:avLst/>
@@ -5471,7 +5736,7 @@
                 </a:solidFill>
                 <a:latin typeface="Calibri"/>
               </a:rPr>
-              <a:t>Inteligencia Artificial Aplicada a la Producción Pesquera  ·  UTN FRCh  ·  PesquerosEnIA  ·  2026</a:t>
+              <a:t>IA Aplicada a la Produccion Pesquera  |  UTN FRCh  |  PesquerosEnIA  |  2026</a:t>
             </a:r>
           </a:p>
         </p:txBody>
@@ -5895,8 +6160,8 @@
         </p:nvSpPr>
         <p:spPr>
           <a:xfrm>
-            <a:off x="0" y="6446520"/>
-            <a:ext cx="12188952" cy="411480"/>
+            <a:off x="0" y="6419088"/>
+            <a:ext cx="12188952" cy="438912"/>
           </a:xfrm>
           <a:prstGeom prst="rect">
             <a:avLst/>
@@ -5930,16 +6195,40 @@
           </a:p>
         </p:txBody>
       </p:sp>
-      <p:sp>
-        <p:nvSpPr>
-          <p:cNvPr id="9" name="TextBox 8"/>
+      <p:pic>
+        <p:nvPicPr>
+          <p:cNvPr id="9" name="Picture 8" descr="logo_pesqueros_symbol.png"/>
+          <p:cNvPicPr>
+            <a:picLocks noChangeAspect="1"/>
+          </p:cNvPicPr>
+          <p:nvPr/>
+        </p:nvPicPr>
+        <p:blipFill>
+          <a:blip r:embed="rId2"/>
+          <a:stretch>
+            <a:fillRect/>
+          </a:stretch>
+        </p:blipFill>
+        <p:spPr>
+          <a:xfrm>
+            <a:off x="137160" y="6455664"/>
+            <a:ext cx="347472" cy="347472"/>
+          </a:xfrm>
+          <a:prstGeom prst="rect">
+            <a:avLst/>
+          </a:prstGeom>
+        </p:spPr>
+      </p:pic>
+      <p:sp>
+        <p:nvSpPr>
+          <p:cNvPr id="10" name="TextBox 9"/>
           <p:cNvSpPr txBox="1"/>
           <p:nvPr/>
         </p:nvSpPr>
         <p:spPr>
           <a:xfrm>
-            <a:off x="274320" y="6473952"/>
-            <a:ext cx="11640312" cy="347472"/>
+            <a:off x="594360" y="6455664"/>
+            <a:ext cx="11457432" cy="347472"/>
           </a:xfrm>
           <a:prstGeom prst="rect">
             <a:avLst/>
@@ -5960,7 +6249,7 @@
                 </a:solidFill>
                 <a:latin typeface="Calibri"/>
               </a:rPr>
-              <a:t>Inteligencia Artificial Aplicada a la Producción Pesquera  ·  UTN FRCh  ·  PesquerosEnIA  ·  2026</a:t>
+              <a:t>IA Aplicada a la Produccion Pesquera  |  UTN FRCh  |  PesquerosEnIA  |  2026</a:t>
             </a:r>
           </a:p>
         </p:txBody>
@@ -6365,8 +6654,8 @@
         </p:nvSpPr>
         <p:spPr>
           <a:xfrm>
-            <a:off x="0" y="6446520"/>
-            <a:ext cx="12188952" cy="411480"/>
+            <a:off x="0" y="6419088"/>
+            <a:ext cx="12188952" cy="438912"/>
           </a:xfrm>
           <a:prstGeom prst="rect">
             <a:avLst/>
@@ -6400,16 +6689,40 @@
           </a:p>
         </p:txBody>
       </p:sp>
-      <p:sp>
-        <p:nvSpPr>
-          <p:cNvPr id="9" name="TextBox 8"/>
+      <p:pic>
+        <p:nvPicPr>
+          <p:cNvPr id="9" name="Picture 8" descr="logo_pesqueros_symbol.png"/>
+          <p:cNvPicPr>
+            <a:picLocks noChangeAspect="1"/>
+          </p:cNvPicPr>
+          <p:nvPr/>
+        </p:nvPicPr>
+        <p:blipFill>
+          <a:blip r:embed="rId2"/>
+          <a:stretch>
+            <a:fillRect/>
+          </a:stretch>
+        </p:blipFill>
+        <p:spPr>
+          <a:xfrm>
+            <a:off x="137160" y="6455664"/>
+            <a:ext cx="347472" cy="347472"/>
+          </a:xfrm>
+          <a:prstGeom prst="rect">
+            <a:avLst/>
+          </a:prstGeom>
+        </p:spPr>
+      </p:pic>
+      <p:sp>
+        <p:nvSpPr>
+          <p:cNvPr id="10" name="TextBox 9"/>
           <p:cNvSpPr txBox="1"/>
           <p:nvPr/>
         </p:nvSpPr>
         <p:spPr>
           <a:xfrm>
-            <a:off x="274320" y="6473952"/>
-            <a:ext cx="11640312" cy="347472"/>
+            <a:off x="594360" y="6455664"/>
+            <a:ext cx="11457432" cy="347472"/>
           </a:xfrm>
           <a:prstGeom prst="rect">
             <a:avLst/>
@@ -6430,7 +6743,7 @@
                 </a:solidFill>
                 <a:latin typeface="Calibri"/>
               </a:rPr>
-              <a:t>Inteligencia Artificial Aplicada a la Producción Pesquera  ·  UTN FRCh  ·  PesquerosEnIA  ·  2026</a:t>
+              <a:t>IA Aplicada a la Produccion Pesquera  |  UTN FRCh  |  PesquerosEnIA  |  2026</a:t>
             </a:r>
           </a:p>
         </p:txBody>
@@ -6892,8 +7205,8 @@
         </p:nvSpPr>
         <p:spPr>
           <a:xfrm>
-            <a:off x="0" y="6446520"/>
-            <a:ext cx="12188952" cy="411480"/>
+            <a:off x="0" y="6419088"/>
+            <a:ext cx="12188952" cy="438912"/>
           </a:xfrm>
           <a:prstGeom prst="rect">
             <a:avLst/>
@@ -6927,16 +7240,40 @@
           </a:p>
         </p:txBody>
       </p:sp>
-      <p:sp>
-        <p:nvSpPr>
-          <p:cNvPr id="9" name="TextBox 8"/>
+      <p:pic>
+        <p:nvPicPr>
+          <p:cNvPr id="9" name="Picture 8" descr="logo_pesqueros_symbol.png"/>
+          <p:cNvPicPr>
+            <a:picLocks noChangeAspect="1"/>
+          </p:cNvPicPr>
+          <p:nvPr/>
+        </p:nvPicPr>
+        <p:blipFill>
+          <a:blip r:embed="rId2"/>
+          <a:stretch>
+            <a:fillRect/>
+          </a:stretch>
+        </p:blipFill>
+        <p:spPr>
+          <a:xfrm>
+            <a:off x="137160" y="6455664"/>
+            <a:ext cx="347472" cy="347472"/>
+          </a:xfrm>
+          <a:prstGeom prst="rect">
+            <a:avLst/>
+          </a:prstGeom>
+        </p:spPr>
+      </p:pic>
+      <p:sp>
+        <p:nvSpPr>
+          <p:cNvPr id="10" name="TextBox 9"/>
           <p:cNvSpPr txBox="1"/>
           <p:nvPr/>
         </p:nvSpPr>
         <p:spPr>
           <a:xfrm>
-            <a:off x="274320" y="6473952"/>
-            <a:ext cx="11640312" cy="347472"/>
+            <a:off x="594360" y="6455664"/>
+            <a:ext cx="11457432" cy="347472"/>
           </a:xfrm>
           <a:prstGeom prst="rect">
             <a:avLst/>
@@ -6957,7 +7294,7 @@
                 </a:solidFill>
                 <a:latin typeface="Calibri"/>
               </a:rPr>
-              <a:t>Inteligencia Artificial Aplicada a la Producción Pesquera  ·  UTN FRCh  ·  PesquerosEnIA  ·  2026</a:t>
+              <a:t>IA Aplicada a la Produccion Pesquera  |  UTN FRCh  |  PesquerosEnIA  |  2026</a:t>
             </a:r>
           </a:p>
         </p:txBody>
@@ -7286,8 +7623,8 @@
         </p:nvSpPr>
         <p:spPr>
           <a:xfrm>
-            <a:off x="0" y="6446520"/>
-            <a:ext cx="12188952" cy="411480"/>
+            <a:off x="0" y="6419088"/>
+            <a:ext cx="12188952" cy="438912"/>
           </a:xfrm>
           <a:prstGeom prst="rect">
             <a:avLst/>
@@ -7321,16 +7658,40 @@
           </a:p>
         </p:txBody>
       </p:sp>
-      <p:sp>
-        <p:nvSpPr>
-          <p:cNvPr id="9" name="TextBox 8"/>
+      <p:pic>
+        <p:nvPicPr>
+          <p:cNvPr id="9" name="Picture 8" descr="logo_pesqueros_symbol.png"/>
+          <p:cNvPicPr>
+            <a:picLocks noChangeAspect="1"/>
+          </p:cNvPicPr>
+          <p:nvPr/>
+        </p:nvPicPr>
+        <p:blipFill>
+          <a:blip r:embed="rId2"/>
+          <a:stretch>
+            <a:fillRect/>
+          </a:stretch>
+        </p:blipFill>
+        <p:spPr>
+          <a:xfrm>
+            <a:off x="137160" y="6455664"/>
+            <a:ext cx="347472" cy="347472"/>
+          </a:xfrm>
+          <a:prstGeom prst="rect">
+            <a:avLst/>
+          </a:prstGeom>
+        </p:spPr>
+      </p:pic>
+      <p:sp>
+        <p:nvSpPr>
+          <p:cNvPr id="10" name="TextBox 9"/>
           <p:cNvSpPr txBox="1"/>
           <p:nvPr/>
         </p:nvSpPr>
         <p:spPr>
           <a:xfrm>
-            <a:off x="274320" y="6473952"/>
-            <a:ext cx="11640312" cy="347472"/>
+            <a:off x="594360" y="6455664"/>
+            <a:ext cx="11457432" cy="347472"/>
           </a:xfrm>
           <a:prstGeom prst="rect">
             <a:avLst/>
@@ -7351,7 +7712,7 @@
                 </a:solidFill>
                 <a:latin typeface="Calibri"/>
               </a:rPr>
-              <a:t>Inteligencia Artificial Aplicada a la Producción Pesquera  ·  UTN FRCh  ·  PesquerosEnIA  ·  2026</a:t>
+              <a:t>IA Aplicada a la Produccion Pesquera  |  UTN FRCh  |  PesquerosEnIA  |  2026</a:t>
             </a:r>
           </a:p>
         </p:txBody>
@@ -9252,8 +9613,8 @@
         </p:nvSpPr>
         <p:spPr>
           <a:xfrm>
-            <a:off x="0" y="6446520"/>
-            <a:ext cx="12188952" cy="411480"/>
+            <a:off x="0" y="6419088"/>
+            <a:ext cx="12188952" cy="438912"/>
           </a:xfrm>
           <a:prstGeom prst="rect">
             <a:avLst/>
@@ -9287,16 +9648,40 @@
           </a:p>
         </p:txBody>
       </p:sp>
-      <p:sp>
-        <p:nvSpPr>
-          <p:cNvPr id="53" name="TextBox 52"/>
+      <p:pic>
+        <p:nvPicPr>
+          <p:cNvPr id="53" name="Picture 52" descr="logo_pesqueros_symbol.png"/>
+          <p:cNvPicPr>
+            <a:picLocks noChangeAspect="1"/>
+          </p:cNvPicPr>
+          <p:nvPr/>
+        </p:nvPicPr>
+        <p:blipFill>
+          <a:blip r:embed="rId2"/>
+          <a:stretch>
+            <a:fillRect/>
+          </a:stretch>
+        </p:blipFill>
+        <p:spPr>
+          <a:xfrm>
+            <a:off x="137160" y="6455664"/>
+            <a:ext cx="347472" cy="347472"/>
+          </a:xfrm>
+          <a:prstGeom prst="rect">
+            <a:avLst/>
+          </a:prstGeom>
+        </p:spPr>
+      </p:pic>
+      <p:sp>
+        <p:nvSpPr>
+          <p:cNvPr id="54" name="TextBox 53"/>
           <p:cNvSpPr txBox="1"/>
           <p:nvPr/>
         </p:nvSpPr>
         <p:spPr>
           <a:xfrm>
-            <a:off x="274320" y="6473952"/>
-            <a:ext cx="11640312" cy="347472"/>
+            <a:off x="594360" y="6455664"/>
+            <a:ext cx="11457432" cy="347472"/>
           </a:xfrm>
           <a:prstGeom prst="rect">
             <a:avLst/>
@@ -9317,7 +9702,7 @@
                 </a:solidFill>
                 <a:latin typeface="Calibri"/>
               </a:rPr>
-              <a:t>Inteligencia Artificial Aplicada a la Producción Pesquera  ·  UTN FRCh  ·  PesquerosEnIA  ·  2026</a:t>
+              <a:t>IA Aplicada a la Produccion Pesquera  |  UTN FRCh  |  PesquerosEnIA  |  2026</a:t>
             </a:r>
           </a:p>
         </p:txBody>
@@ -9703,8 +10088,8 @@
         </p:nvSpPr>
         <p:spPr>
           <a:xfrm>
-            <a:off x="0" y="6446520"/>
-            <a:ext cx="12188952" cy="411480"/>
+            <a:off x="0" y="6419088"/>
+            <a:ext cx="12188952" cy="438912"/>
           </a:xfrm>
           <a:prstGeom prst="rect">
             <a:avLst/>
@@ -9738,16 +10123,40 @@
           </a:p>
         </p:txBody>
       </p:sp>
-      <p:sp>
-        <p:nvSpPr>
-          <p:cNvPr id="9" name="TextBox 8"/>
+      <p:pic>
+        <p:nvPicPr>
+          <p:cNvPr id="9" name="Picture 8" descr="logo_pesqueros_symbol.png"/>
+          <p:cNvPicPr>
+            <a:picLocks noChangeAspect="1"/>
+          </p:cNvPicPr>
+          <p:nvPr/>
+        </p:nvPicPr>
+        <p:blipFill>
+          <a:blip r:embed="rId2"/>
+          <a:stretch>
+            <a:fillRect/>
+          </a:stretch>
+        </p:blipFill>
+        <p:spPr>
+          <a:xfrm>
+            <a:off x="137160" y="6455664"/>
+            <a:ext cx="347472" cy="347472"/>
+          </a:xfrm>
+          <a:prstGeom prst="rect">
+            <a:avLst/>
+          </a:prstGeom>
+        </p:spPr>
+      </p:pic>
+      <p:sp>
+        <p:nvSpPr>
+          <p:cNvPr id="10" name="TextBox 9"/>
           <p:cNvSpPr txBox="1"/>
           <p:nvPr/>
         </p:nvSpPr>
         <p:spPr>
           <a:xfrm>
-            <a:off x="274320" y="6473952"/>
-            <a:ext cx="11640312" cy="347472"/>
+            <a:off x="594360" y="6455664"/>
+            <a:ext cx="11457432" cy="347472"/>
           </a:xfrm>
           <a:prstGeom prst="rect">
             <a:avLst/>
@@ -9768,7 +10177,7 @@
                 </a:solidFill>
                 <a:latin typeface="Calibri"/>
               </a:rPr>
-              <a:t>Inteligencia Artificial Aplicada a la Producción Pesquera  ·  UTN FRCh  ·  PesquerosEnIA  ·  2026</a:t>
+              <a:t>IA Aplicada a la Produccion Pesquera  |  UTN FRCh  |  PesquerosEnIA  |  2026</a:t>
             </a:r>
           </a:p>
         </p:txBody>
@@ -10789,8 +11198,8 @@
         </p:nvSpPr>
         <p:spPr>
           <a:xfrm>
-            <a:off x="0" y="6446520"/>
-            <a:ext cx="12188952" cy="411480"/>
+            <a:off x="0" y="6419088"/>
+            <a:ext cx="12188952" cy="438912"/>
           </a:xfrm>
           <a:prstGeom prst="rect">
             <a:avLst/>
@@ -10824,16 +11233,40 @@
           </a:p>
         </p:txBody>
       </p:sp>
-      <p:sp>
-        <p:nvSpPr>
-          <p:cNvPr id="29" name="TextBox 28"/>
+      <p:pic>
+        <p:nvPicPr>
+          <p:cNvPr id="29" name="Picture 28" descr="logo_pesqueros_symbol.png"/>
+          <p:cNvPicPr>
+            <a:picLocks noChangeAspect="1"/>
+          </p:cNvPicPr>
+          <p:nvPr/>
+        </p:nvPicPr>
+        <p:blipFill>
+          <a:blip r:embed="rId2"/>
+          <a:stretch>
+            <a:fillRect/>
+          </a:stretch>
+        </p:blipFill>
+        <p:spPr>
+          <a:xfrm>
+            <a:off x="137160" y="6455664"/>
+            <a:ext cx="347472" cy="347472"/>
+          </a:xfrm>
+          <a:prstGeom prst="rect">
+            <a:avLst/>
+          </a:prstGeom>
+        </p:spPr>
+      </p:pic>
+      <p:sp>
+        <p:nvSpPr>
+          <p:cNvPr id="30" name="TextBox 29"/>
           <p:cNvSpPr txBox="1"/>
           <p:nvPr/>
         </p:nvSpPr>
         <p:spPr>
           <a:xfrm>
-            <a:off x="274320" y="6473952"/>
-            <a:ext cx="11640312" cy="347472"/>
+            <a:off x="594360" y="6455664"/>
+            <a:ext cx="11457432" cy="347472"/>
           </a:xfrm>
           <a:prstGeom prst="rect">
             <a:avLst/>
@@ -10854,7 +11287,7 @@
                 </a:solidFill>
                 <a:latin typeface="Calibri"/>
               </a:rPr>
-              <a:t>Inteligencia Artificial Aplicada a la Producción Pesquera  ·  UTN FRCh  ·  PesquerosEnIA  ·  2026</a:t>
+              <a:t>IA Aplicada a la Produccion Pesquera  |  UTN FRCh  |  PesquerosEnIA  |  2026</a:t>
             </a:r>
           </a:p>
         </p:txBody>
@@ -11805,8 +12238,8 @@
         </p:nvSpPr>
         <p:spPr>
           <a:xfrm>
-            <a:off x="0" y="6446520"/>
-            <a:ext cx="12188952" cy="411480"/>
+            <a:off x="0" y="6419088"/>
+            <a:ext cx="12188952" cy="438912"/>
           </a:xfrm>
           <a:prstGeom prst="rect">
             <a:avLst/>
@@ -11840,16 +12273,40 @@
           </a:p>
         </p:txBody>
       </p:sp>
-      <p:sp>
-        <p:nvSpPr>
-          <p:cNvPr id="27" name="TextBox 26"/>
+      <p:pic>
+        <p:nvPicPr>
+          <p:cNvPr id="27" name="Picture 26" descr="logo_pesqueros_symbol.png"/>
+          <p:cNvPicPr>
+            <a:picLocks noChangeAspect="1"/>
+          </p:cNvPicPr>
+          <p:nvPr/>
+        </p:nvPicPr>
+        <p:blipFill>
+          <a:blip r:embed="rId2"/>
+          <a:stretch>
+            <a:fillRect/>
+          </a:stretch>
+        </p:blipFill>
+        <p:spPr>
+          <a:xfrm>
+            <a:off x="137160" y="6455664"/>
+            <a:ext cx="347472" cy="347472"/>
+          </a:xfrm>
+          <a:prstGeom prst="rect">
+            <a:avLst/>
+          </a:prstGeom>
+        </p:spPr>
+      </p:pic>
+      <p:sp>
+        <p:nvSpPr>
+          <p:cNvPr id="28" name="TextBox 27"/>
           <p:cNvSpPr txBox="1"/>
           <p:nvPr/>
         </p:nvSpPr>
         <p:spPr>
           <a:xfrm>
-            <a:off x="274320" y="6473952"/>
-            <a:ext cx="11640312" cy="347472"/>
+            <a:off x="594360" y="6455664"/>
+            <a:ext cx="11457432" cy="347472"/>
           </a:xfrm>
           <a:prstGeom prst="rect">
             <a:avLst/>
@@ -11870,7 +12327,7 @@
                 </a:solidFill>
                 <a:latin typeface="Calibri"/>
               </a:rPr>
-              <a:t>Inteligencia Artificial Aplicada a la Producción Pesquera  ·  UTN FRCh  ·  PesquerosEnIA  ·  2026</a:t>
+              <a:t>IA Aplicada a la Produccion Pesquera  |  UTN FRCh  |  PesquerosEnIA  |  2026</a:t>
             </a:r>
           </a:p>
         </p:txBody>
@@ -12237,8 +12694,8 @@
         </p:nvSpPr>
         <p:spPr>
           <a:xfrm>
-            <a:off x="0" y="6446520"/>
-            <a:ext cx="12188952" cy="411480"/>
+            <a:off x="0" y="6419088"/>
+            <a:ext cx="12188952" cy="438912"/>
           </a:xfrm>
           <a:prstGeom prst="rect">
             <a:avLst/>
@@ -12272,16 +12729,40 @@
           </a:p>
         </p:txBody>
       </p:sp>
-      <p:sp>
-        <p:nvSpPr>
-          <p:cNvPr id="9" name="TextBox 8"/>
+      <p:pic>
+        <p:nvPicPr>
+          <p:cNvPr id="9" name="Picture 8" descr="logo_pesqueros_symbol.png"/>
+          <p:cNvPicPr>
+            <a:picLocks noChangeAspect="1"/>
+          </p:cNvPicPr>
+          <p:nvPr/>
+        </p:nvPicPr>
+        <p:blipFill>
+          <a:blip r:embed="rId2"/>
+          <a:stretch>
+            <a:fillRect/>
+          </a:stretch>
+        </p:blipFill>
+        <p:spPr>
+          <a:xfrm>
+            <a:off x="137160" y="6455664"/>
+            <a:ext cx="347472" cy="347472"/>
+          </a:xfrm>
+          <a:prstGeom prst="rect">
+            <a:avLst/>
+          </a:prstGeom>
+        </p:spPr>
+      </p:pic>
+      <p:sp>
+        <p:nvSpPr>
+          <p:cNvPr id="10" name="TextBox 9"/>
           <p:cNvSpPr txBox="1"/>
           <p:nvPr/>
         </p:nvSpPr>
         <p:spPr>
           <a:xfrm>
-            <a:off x="274320" y="6473952"/>
-            <a:ext cx="11640312" cy="347472"/>
+            <a:off x="594360" y="6455664"/>
+            <a:ext cx="11457432" cy="347472"/>
           </a:xfrm>
           <a:prstGeom prst="rect">
             <a:avLst/>
@@ -12302,7 +12783,7 @@
                 </a:solidFill>
                 <a:latin typeface="Calibri"/>
               </a:rPr>
-              <a:t>Inteligencia Artificial Aplicada a la Producción Pesquera  ·  UTN FRCh  ·  PesquerosEnIA  ·  2026</a:t>
+              <a:t>IA Aplicada a la Produccion Pesquera  |  UTN FRCh  |  PesquerosEnIA  |  2026</a:t>
             </a:r>
           </a:p>
         </p:txBody>
@@ -12376,8 +12857,51 @@
         </p:nvSpPr>
         <p:spPr>
           <a:xfrm>
+            <a:off x="8714232" y="0"/>
+            <a:ext cx="3474720" cy="6858000"/>
+          </a:xfrm>
+          <a:prstGeom prst="rect">
+            <a:avLst/>
+          </a:prstGeom>
+          <a:solidFill>
+            <a:srgbClr val="003C6B"/>
+          </a:solidFill>
+          <a:ln>
+            <a:noFill/>
+          </a:ln>
+        </p:spPr>
+        <p:style>
+          <a:lnRef idx="1">
+            <a:schemeClr val="accent1"/>
+          </a:lnRef>
+          <a:fillRef idx="3">
+            <a:schemeClr val="accent1"/>
+          </a:fillRef>
+          <a:effectRef idx="2">
+            <a:schemeClr val="accent1"/>
+          </a:effectRef>
+          <a:fontRef idx="minor">
+            <a:schemeClr val="lt1"/>
+          </a:fontRef>
+        </p:style>
+        <p:txBody>
+          <a:bodyPr rtlCol="0" anchor="ctr"/>
+          <a:lstStyle/>
+          <a:p>
+            <a:pPr algn="ctr"/>
+          </a:p>
+        </p:txBody>
+      </p:sp>
+      <p:sp>
+        <p:nvSpPr>
+          <p:cNvPr id="4" name="Rectangle 3"/>
+          <p:cNvSpPr/>
+          <p:nvPr/>
+        </p:nvSpPr>
+        <p:spPr>
+          <a:xfrm>
             <a:off x="0" y="0"/>
-            <a:ext cx="12188952" cy="109728"/>
+            <a:ext cx="12188952" cy="91440"/>
           </a:xfrm>
           <a:prstGeom prst="rect">
             <a:avLst/>
@@ -12413,14 +12937,14 @@
       </p:sp>
       <p:sp>
         <p:nvSpPr>
-          <p:cNvPr id="4" name="Rectangle 3"/>
+          <p:cNvPr id="5" name="Rectangle 4"/>
           <p:cNvSpPr/>
           <p:nvPr/>
         </p:nvSpPr>
         <p:spPr>
           <a:xfrm>
-            <a:off x="0" y="6748272"/>
-            <a:ext cx="12188952" cy="109728"/>
+            <a:off x="0" y="6766560"/>
+            <a:ext cx="12188952" cy="91440"/>
           </a:xfrm>
           <a:prstGeom prst="rect">
             <a:avLst/>
@@ -12456,7 +12980,7 @@
       </p:sp>
       <p:pic>
         <p:nvPicPr>
-          <p:cNvPr id="5" name="Picture 4" descr="logo_utn_frch_negro.png"/>
+          <p:cNvPr id="6" name="Picture 5" descr="logo_utn_frch_negro.png"/>
           <p:cNvPicPr>
             <a:picLocks noChangeAspect="1"/>
           </p:cNvPicPr>
@@ -12470,102 +12994,72 @@
         </p:blipFill>
         <p:spPr>
           <a:xfrm>
-            <a:off x="365760" y="228600"/>
-            <a:ext cx="1537714" cy="822960"/>
+            <a:off x="365760" y="155448"/>
+            <a:ext cx="1366857" cy="731520"/>
           </a:xfrm>
           <a:prstGeom prst="rect">
             <a:avLst/>
           </a:prstGeom>
         </p:spPr>
       </p:pic>
-      <p:sp>
-        <p:nvSpPr>
-          <p:cNvPr id="6" name="Rectangle 5"/>
+      <p:pic>
+        <p:nvPicPr>
+          <p:cNvPr id="7" name="Picture 6" descr="logo_pesqueros_full.png"/>
+          <p:cNvPicPr>
+            <a:picLocks noChangeAspect="1"/>
+          </p:cNvPicPr>
+          <p:nvPr/>
+        </p:nvPicPr>
+        <p:blipFill>
+          <a:blip r:embed="rId3"/>
+          <a:stretch>
+            <a:fillRect/>
+          </a:stretch>
+        </p:blipFill>
+        <p:spPr>
+          <a:xfrm>
+            <a:off x="2926080" y="201168"/>
+            <a:ext cx="1981200" cy="594360"/>
+          </a:xfrm>
+          <a:prstGeom prst="rect">
+            <a:avLst/>
+          </a:prstGeom>
+        </p:spPr>
+      </p:pic>
+      <p:pic>
+        <p:nvPicPr>
+          <p:cNvPr id="8" name="Picture 7" descr="logo_ariel_symbol.png"/>
+          <p:cNvPicPr>
+            <a:picLocks noChangeAspect="1"/>
+          </p:cNvPicPr>
+          <p:nvPr/>
+        </p:nvPicPr>
+        <p:blipFill>
+          <a:blip r:embed="rId4"/>
+          <a:stretch>
+            <a:fillRect/>
+          </a:stretch>
+        </p:blipFill>
+        <p:spPr>
+          <a:xfrm>
+            <a:off x="5120640" y="201168"/>
+            <a:ext cx="1981200" cy="594360"/>
+          </a:xfrm>
+          <a:prstGeom prst="rect">
+            <a:avLst/>
+          </a:prstGeom>
+        </p:spPr>
+      </p:pic>
+      <p:sp>
+        <p:nvSpPr>
+          <p:cNvPr id="9" name="Rectangle 8"/>
           <p:cNvSpPr/>
           <p:nvPr/>
         </p:nvSpPr>
         <p:spPr>
           <a:xfrm>
-            <a:off x="10177272" y="201168"/>
-            <a:ext cx="1828800" cy="822960"/>
-          </a:xfrm>
-          <a:prstGeom prst="rect">
-            <a:avLst/>
-          </a:prstGeom>
-          <a:solidFill>
-            <a:srgbClr val="059669"/>
-          </a:solidFill>
-          <a:ln>
-            <a:noFill/>
-          </a:ln>
-        </p:spPr>
-        <p:style>
-          <a:lnRef idx="1">
-            <a:schemeClr val="accent1"/>
-          </a:lnRef>
-          <a:fillRef idx="3">
-            <a:schemeClr val="accent1"/>
-          </a:fillRef>
-          <a:effectRef idx="2">
-            <a:schemeClr val="accent1"/>
-          </a:effectRef>
-          <a:fontRef idx="minor">
-            <a:schemeClr val="lt1"/>
-          </a:fontRef>
-        </p:style>
-        <p:txBody>
-          <a:bodyPr rtlCol="0" anchor="ctr"/>
-          <a:lstStyle/>
-          <a:p>
-            <a:pPr algn="ctr"/>
-          </a:p>
-        </p:txBody>
-      </p:sp>
-      <p:sp>
-        <p:nvSpPr>
-          <p:cNvPr id="7" name="TextBox 6"/>
-          <p:cNvSpPr txBox="1"/>
-          <p:nvPr/>
-        </p:nvSpPr>
-        <p:spPr>
-          <a:xfrm>
-            <a:off x="10177272" y="201168"/>
-            <a:ext cx="1828800" cy="822960"/>
-          </a:xfrm>
-          <a:prstGeom prst="rect">
-            <a:avLst/>
-          </a:prstGeom>
-          <a:noFill/>
-        </p:spPr>
-        <p:txBody>
-          <a:bodyPr wrap="none">
-            <a:spAutoFit/>
-          </a:bodyPr>
-          <a:lstStyle/>
-          <a:p>
-            <a:pPr algn="ctr"/>
-            <a:r>
-              <a:rPr sz="900" b="1">
-                <a:solidFill>
-                  <a:srgbClr val="FFFFFF"/>
-                </a:solidFill>
-                <a:latin typeface="Calibri"/>
-              </a:rPr>
-              <a:t>PesquerosEnIA</a:t>
-            </a:r>
-          </a:p>
-        </p:txBody>
-      </p:sp>
-      <p:sp>
-        <p:nvSpPr>
-          <p:cNvPr id="8" name="Rectangle 7"/>
-          <p:cNvSpPr/>
-          <p:nvPr/>
-        </p:nvSpPr>
-        <p:spPr>
-          <a:xfrm>
-            <a:off x="365760" y="1280160"/>
-            <a:ext cx="11457432" cy="36576"/>
+            <a:off x="365760" y="1078992"/>
+            <a:ext cx="8348472" cy="32004"/>
           </a:xfrm>
           <a:prstGeom prst="rect">
             <a:avLst/>
@@ -12601,14 +13095,14 @@
       </p:sp>
       <p:sp>
         <p:nvSpPr>
-          <p:cNvPr id="9" name="TextBox 8"/>
+          <p:cNvPr id="10" name="TextBox 9"/>
           <p:cNvSpPr txBox="1"/>
           <p:nvPr/>
         </p:nvSpPr>
         <p:spPr>
           <a:xfrm>
-            <a:off x="365760" y="1463040"/>
-            <a:ext cx="11457432" cy="1645920"/>
+            <a:off x="365760" y="1280160"/>
+            <a:ext cx="8074152" cy="1645920"/>
           </a:xfrm>
           <a:prstGeom prst="rect">
             <a:avLst/>
@@ -12621,9 +13115,9 @@
           </a:bodyPr>
           <a:lstStyle/>
           <a:p>
-            <a:pPr algn="ctr"/>
-            <a:r>
-              <a:rPr sz="3400" b="1" i="0">
+            <a:pPr algn="l"/>
+            <a:r>
+              <a:rPr sz="3200" b="1" i="0">
                 <a:solidFill>
                   <a:srgbClr val="FFFFFF"/>
                 </a:solidFill>
@@ -12636,14 +13130,14 @@
       </p:sp>
       <p:sp>
         <p:nvSpPr>
-          <p:cNvPr id="10" name="TextBox 9"/>
+          <p:cNvPr id="11" name="TextBox 10"/>
           <p:cNvSpPr txBox="1"/>
           <p:nvPr/>
         </p:nvSpPr>
         <p:spPr>
           <a:xfrm>
-            <a:off x="365760" y="3017520"/>
-            <a:ext cx="11457432" cy="731520"/>
+            <a:off x="365760" y="2880360"/>
+            <a:ext cx="8074152" cy="685800"/>
           </a:xfrm>
           <a:prstGeom prst="rect">
             <a:avLst/>
@@ -12656,9 +13150,9 @@
           </a:bodyPr>
           <a:lstStyle/>
           <a:p>
-            <a:pPr algn="ctr"/>
-            <a:r>
-              <a:rPr sz="1900" b="0" i="0">
+            <a:pPr algn="l"/>
+            <a:r>
+              <a:rPr sz="1600" b="0" i="0">
                 <a:solidFill>
                   <a:srgbClr val="0099CC"/>
                 </a:solidFill>
@@ -12671,14 +13165,14 @@
       </p:sp>
       <p:sp>
         <p:nvSpPr>
-          <p:cNvPr id="11" name="Rectangle 10"/>
+          <p:cNvPr id="12" name="Rectangle 11"/>
           <p:cNvSpPr/>
           <p:nvPr/>
         </p:nvSpPr>
         <p:spPr>
           <a:xfrm>
-            <a:off x="1828800" y="3931920"/>
-            <a:ext cx="8531352" cy="36576"/>
+            <a:off x="365760" y="3703320"/>
+            <a:ext cx="5029200" cy="32004"/>
           </a:xfrm>
           <a:prstGeom prst="rect">
             <a:avLst/>
@@ -12714,14 +13208,14 @@
       </p:sp>
       <p:sp>
         <p:nvSpPr>
-          <p:cNvPr id="12" name="TextBox 11"/>
+          <p:cNvPr id="13" name="TextBox 12"/>
           <p:cNvSpPr txBox="1"/>
           <p:nvPr/>
         </p:nvSpPr>
         <p:spPr>
           <a:xfrm>
-            <a:off x="365760" y="4114800"/>
-            <a:ext cx="11457432" cy="548640"/>
+            <a:off x="365760" y="3794760"/>
+            <a:ext cx="7772400" cy="502920"/>
           </a:xfrm>
           <a:prstGeom prst="rect">
             <a:avLst/>
@@ -12734,29 +13228,72 @@
           </a:bodyPr>
           <a:lstStyle/>
           <a:p>
+            <a:pPr algn="l"/>
+            <a:r>
+              <a:rPr sz="1400" b="0" i="0">
+                <a:solidFill>
+                  <a:srgbClr val="BEE1FF"/>
+                </a:solidFill>
+                <a:latin typeface="Consolas"/>
+              </a:rPr>
+              <a:t>github.com/PesquerosEnIA/curso-ia-produccion-pesquera</a:t>
+            </a:r>
+          </a:p>
+        </p:txBody>
+      </p:sp>
+      <p:sp>
+        <p:nvSpPr>
+          <p:cNvPr id="14" name="Rectangle 13"/>
+          <p:cNvSpPr/>
+          <p:nvPr/>
+        </p:nvSpPr>
+        <p:spPr>
+          <a:xfrm>
+            <a:off x="365760" y="4434840"/>
+            <a:ext cx="7772400" cy="822960"/>
+          </a:xfrm>
+          <a:prstGeom prst="rect">
+            <a:avLst/>
+          </a:prstGeom>
+          <a:solidFill>
+            <a:srgbClr val="0064B1"/>
+          </a:solidFill>
+          <a:ln>
+            <a:noFill/>
+          </a:ln>
+        </p:spPr>
+        <p:style>
+          <a:lnRef idx="1">
+            <a:schemeClr val="accent1"/>
+          </a:lnRef>
+          <a:fillRef idx="3">
+            <a:schemeClr val="accent1"/>
+          </a:fillRef>
+          <a:effectRef idx="2">
+            <a:schemeClr val="accent1"/>
+          </a:effectRef>
+          <a:fontRef idx="minor">
+            <a:schemeClr val="lt1"/>
+          </a:fontRef>
+        </p:style>
+        <p:txBody>
+          <a:bodyPr rtlCol="0" anchor="ctr"/>
+          <a:lstStyle/>
+          <a:p>
             <a:pPr algn="ctr"/>
-            <a:r>
-              <a:rPr sz="1600" b="0" i="0">
-                <a:solidFill>
-                  <a:srgbClr val="0099CC"/>
-                </a:solidFill>
-                <a:latin typeface="Consolas"/>
-              </a:rPr>
-              <a:t>github.com/PesquerosEnIA/curso-ia-produccion-pesquera</a:t>
-            </a:r>
-          </a:p>
-        </p:txBody>
-      </p:sp>
-      <p:sp>
-        <p:nvSpPr>
-          <p:cNvPr id="13" name="TextBox 12"/>
+          </a:p>
+        </p:txBody>
+      </p:sp>
+      <p:sp>
+        <p:nvSpPr>
+          <p:cNvPr id="15" name="TextBox 14"/>
           <p:cNvSpPr txBox="1"/>
           <p:nvPr/>
         </p:nvSpPr>
         <p:spPr>
           <a:xfrm>
-            <a:off x="365760" y="4846320"/>
-            <a:ext cx="11457432" cy="731520"/>
+            <a:off x="502920" y="4480560"/>
+            <a:ext cx="7498079" cy="731520"/>
           </a:xfrm>
           <a:prstGeom prst="rect">
             <a:avLst/>
@@ -12769,11 +13306,11 @@
           </a:bodyPr>
           <a:lstStyle/>
           <a:p>
-            <a:pPr algn="ctr"/>
-            <a:r>
-              <a:rPr sz="1500" b="0" i="0">
-                <a:solidFill>
-                  <a:srgbClr val="C8E6FF"/>
+            <a:pPr algn="l"/>
+            <a:r>
+              <a:rPr sz="1300" b="0" i="0">
+                <a:solidFill>
+                  <a:srgbClr val="FFFFFF"/>
                 </a:solidFill>
                 <a:latin typeface="Calibri"/>
               </a:rPr>
@@ -12784,14 +13321,14 @@
       </p:sp>
       <p:sp>
         <p:nvSpPr>
-          <p:cNvPr id="14" name="TextBox 13"/>
+          <p:cNvPr id="16" name="TextBox 15"/>
           <p:cNvSpPr txBox="1"/>
           <p:nvPr/>
         </p:nvSpPr>
         <p:spPr>
           <a:xfrm>
-            <a:off x="365760" y="6080760"/>
-            <a:ext cx="11457432" cy="457200"/>
+            <a:off x="8988552" y="2011680"/>
+            <a:ext cx="2926080" cy="1280160"/>
           </a:xfrm>
           <a:prstGeom prst="rect">
             <a:avLst/>
@@ -12806,13 +13343,49 @@
           <a:p>
             <a:pPr algn="ctr"/>
             <a:r>
-              <a:rPr sz="1300" b="0" i="0">
-                <a:solidFill>
-                  <a:srgbClr val="0099CC"/>
-                </a:solidFill>
-                <a:latin typeface="Calibri"/>
-              </a:rPr>
-              <a:t>UTN FRCh · PesquerosEnIA · 2026</a:t>
+              <a:rPr sz="1600" b="0" i="0">
+                <a:solidFill>
+                  <a:srgbClr val="B4D7FF"/>
+                </a:solidFill>
+                <a:latin typeface="Consolas"/>
+              </a:rPr>
+              <a:t>github.com/
+PesquerosEnIA</a:t>
+            </a:r>
+          </a:p>
+        </p:txBody>
+      </p:sp>
+      <p:sp>
+        <p:nvSpPr>
+          <p:cNvPr id="17" name="TextBox 16"/>
+          <p:cNvSpPr txBox="1"/>
+          <p:nvPr/>
+        </p:nvSpPr>
+        <p:spPr>
+          <a:xfrm>
+            <a:off x="365760" y="6382512"/>
+            <a:ext cx="8074152" cy="384048"/>
+          </a:xfrm>
+          <a:prstGeom prst="rect">
+            <a:avLst/>
+          </a:prstGeom>
+          <a:noFill/>
+        </p:spPr>
+        <p:txBody>
+          <a:bodyPr wrap="square">
+            <a:spAutoFit/>
+          </a:bodyPr>
+          <a:lstStyle/>
+          <a:p>
+            <a:pPr algn="l"/>
+            <a:r>
+              <a:rPr sz="1100" b="0" i="0">
+                <a:solidFill>
+                  <a:srgbClr val="A0C8F0"/>
+                </a:solidFill>
+                <a:latin typeface="Calibri"/>
+              </a:rPr>
+              <a:t>UTN FRCh  |  PesquerosEnIA  |  2026</a:t>
             </a:r>
           </a:p>
         </p:txBody>
@@ -13198,8 +13771,8 @@
         </p:nvSpPr>
         <p:spPr>
           <a:xfrm>
-            <a:off x="0" y="6446520"/>
-            <a:ext cx="12188952" cy="411480"/>
+            <a:off x="0" y="6419088"/>
+            <a:ext cx="12188952" cy="438912"/>
           </a:xfrm>
           <a:prstGeom prst="rect">
             <a:avLst/>
@@ -13233,16 +13806,40 @@
           </a:p>
         </p:txBody>
       </p:sp>
-      <p:sp>
-        <p:nvSpPr>
-          <p:cNvPr id="9" name="TextBox 8"/>
+      <p:pic>
+        <p:nvPicPr>
+          <p:cNvPr id="9" name="Picture 8" descr="logo_pesqueros_symbol.png"/>
+          <p:cNvPicPr>
+            <a:picLocks noChangeAspect="1"/>
+          </p:cNvPicPr>
+          <p:nvPr/>
+        </p:nvPicPr>
+        <p:blipFill>
+          <a:blip r:embed="rId2"/>
+          <a:stretch>
+            <a:fillRect/>
+          </a:stretch>
+        </p:blipFill>
+        <p:spPr>
+          <a:xfrm>
+            <a:off x="137160" y="6455664"/>
+            <a:ext cx="347472" cy="347472"/>
+          </a:xfrm>
+          <a:prstGeom prst="rect">
+            <a:avLst/>
+          </a:prstGeom>
+        </p:spPr>
+      </p:pic>
+      <p:sp>
+        <p:nvSpPr>
+          <p:cNvPr id="10" name="TextBox 9"/>
           <p:cNvSpPr txBox="1"/>
           <p:nvPr/>
         </p:nvSpPr>
         <p:spPr>
           <a:xfrm>
-            <a:off x="274320" y="6473952"/>
-            <a:ext cx="11640312" cy="347472"/>
+            <a:off x="594360" y="6455664"/>
+            <a:ext cx="11457432" cy="347472"/>
           </a:xfrm>
           <a:prstGeom prst="rect">
             <a:avLst/>
@@ -13263,7 +13860,7 @@
                 </a:solidFill>
                 <a:latin typeface="Calibri"/>
               </a:rPr>
-              <a:t>Inteligencia Artificial Aplicada a la Producción Pesquera  ·  UTN FRCh  ·  PesquerosEnIA  ·  2026</a:t>
+              <a:t>IA Aplicada a la Produccion Pesquera  |  UTN FRCh  |  PesquerosEnIA  |  2026</a:t>
             </a:r>
           </a:p>
         </p:txBody>
@@ -14276,8 +14873,8 @@
         </p:nvSpPr>
         <p:spPr>
           <a:xfrm>
-            <a:off x="0" y="6446520"/>
-            <a:ext cx="12188952" cy="411480"/>
+            <a:off x="0" y="6419088"/>
+            <a:ext cx="12188952" cy="438912"/>
           </a:xfrm>
           <a:prstGeom prst="rect">
             <a:avLst/>
@@ -14311,16 +14908,40 @@
           </a:p>
         </p:txBody>
       </p:sp>
-      <p:sp>
-        <p:nvSpPr>
-          <p:cNvPr id="29" name="TextBox 28"/>
+      <p:pic>
+        <p:nvPicPr>
+          <p:cNvPr id="29" name="Picture 28" descr="logo_pesqueros_symbol.png"/>
+          <p:cNvPicPr>
+            <a:picLocks noChangeAspect="1"/>
+          </p:cNvPicPr>
+          <p:nvPr/>
+        </p:nvPicPr>
+        <p:blipFill>
+          <a:blip r:embed="rId2"/>
+          <a:stretch>
+            <a:fillRect/>
+          </a:stretch>
+        </p:blipFill>
+        <p:spPr>
+          <a:xfrm>
+            <a:off x="137160" y="6455664"/>
+            <a:ext cx="347472" cy="347472"/>
+          </a:xfrm>
+          <a:prstGeom prst="rect">
+            <a:avLst/>
+          </a:prstGeom>
+        </p:spPr>
+      </p:pic>
+      <p:sp>
+        <p:nvSpPr>
+          <p:cNvPr id="30" name="TextBox 29"/>
           <p:cNvSpPr txBox="1"/>
           <p:nvPr/>
         </p:nvSpPr>
         <p:spPr>
           <a:xfrm>
-            <a:off x="274320" y="6473952"/>
-            <a:ext cx="11640312" cy="347472"/>
+            <a:off x="594360" y="6455664"/>
+            <a:ext cx="11457432" cy="347472"/>
           </a:xfrm>
           <a:prstGeom prst="rect">
             <a:avLst/>
@@ -14341,7 +14962,7 @@
                 </a:solidFill>
                 <a:latin typeface="Calibri"/>
               </a:rPr>
-              <a:t>Inteligencia Artificial Aplicada a la Producción Pesquera  ·  UTN FRCh  ·  PesquerosEnIA  ·  2026</a:t>
+              <a:t>IA Aplicada a la Produccion Pesquera  |  UTN FRCh  |  PesquerosEnIA  |  2026</a:t>
             </a:r>
           </a:p>
         </p:txBody>
@@ -14765,8 +15386,8 @@
         </p:nvSpPr>
         <p:spPr>
           <a:xfrm>
-            <a:off x="0" y="6446520"/>
-            <a:ext cx="12188952" cy="411480"/>
+            <a:off x="0" y="6419088"/>
+            <a:ext cx="12188952" cy="438912"/>
           </a:xfrm>
           <a:prstGeom prst="rect">
             <a:avLst/>
@@ -14800,16 +15421,40 @@
           </a:p>
         </p:txBody>
       </p:sp>
-      <p:sp>
-        <p:nvSpPr>
-          <p:cNvPr id="9" name="TextBox 8"/>
+      <p:pic>
+        <p:nvPicPr>
+          <p:cNvPr id="9" name="Picture 8" descr="logo_pesqueros_symbol.png"/>
+          <p:cNvPicPr>
+            <a:picLocks noChangeAspect="1"/>
+          </p:cNvPicPr>
+          <p:nvPr/>
+        </p:nvPicPr>
+        <p:blipFill>
+          <a:blip r:embed="rId2"/>
+          <a:stretch>
+            <a:fillRect/>
+          </a:stretch>
+        </p:blipFill>
+        <p:spPr>
+          <a:xfrm>
+            <a:off x="137160" y="6455664"/>
+            <a:ext cx="347472" cy="347472"/>
+          </a:xfrm>
+          <a:prstGeom prst="rect">
+            <a:avLst/>
+          </a:prstGeom>
+        </p:spPr>
+      </p:pic>
+      <p:sp>
+        <p:nvSpPr>
+          <p:cNvPr id="10" name="TextBox 9"/>
           <p:cNvSpPr txBox="1"/>
           <p:nvPr/>
         </p:nvSpPr>
         <p:spPr>
           <a:xfrm>
-            <a:off x="274320" y="6473952"/>
-            <a:ext cx="11640312" cy="347472"/>
+            <a:off x="594360" y="6455664"/>
+            <a:ext cx="11457432" cy="347472"/>
           </a:xfrm>
           <a:prstGeom prst="rect">
             <a:avLst/>
@@ -14830,7 +15475,7 @@
                 </a:solidFill>
                 <a:latin typeface="Calibri"/>
               </a:rPr>
-              <a:t>Inteligencia Artificial Aplicada a la Producción Pesquera  ·  UTN FRCh  ·  PesquerosEnIA  ·  2026</a:t>
+              <a:t>IA Aplicada a la Produccion Pesquera  |  UTN FRCh  |  PesquerosEnIA  |  2026</a:t>
             </a:r>
           </a:p>
         </p:txBody>
@@ -15843,8 +16488,8 @@
         </p:nvSpPr>
         <p:spPr>
           <a:xfrm>
-            <a:off x="0" y="6446520"/>
-            <a:ext cx="12188952" cy="411480"/>
+            <a:off x="0" y="6419088"/>
+            <a:ext cx="12188952" cy="438912"/>
           </a:xfrm>
           <a:prstGeom prst="rect">
             <a:avLst/>
@@ -15878,16 +16523,40 @@
           </a:p>
         </p:txBody>
       </p:sp>
-      <p:sp>
-        <p:nvSpPr>
-          <p:cNvPr id="29" name="TextBox 28"/>
+      <p:pic>
+        <p:nvPicPr>
+          <p:cNvPr id="29" name="Picture 28" descr="logo_pesqueros_symbol.png"/>
+          <p:cNvPicPr>
+            <a:picLocks noChangeAspect="1"/>
+          </p:cNvPicPr>
+          <p:nvPr/>
+        </p:nvPicPr>
+        <p:blipFill>
+          <a:blip r:embed="rId2"/>
+          <a:stretch>
+            <a:fillRect/>
+          </a:stretch>
+        </p:blipFill>
+        <p:spPr>
+          <a:xfrm>
+            <a:off x="137160" y="6455664"/>
+            <a:ext cx="347472" cy="347472"/>
+          </a:xfrm>
+          <a:prstGeom prst="rect">
+            <a:avLst/>
+          </a:prstGeom>
+        </p:spPr>
+      </p:pic>
+      <p:sp>
+        <p:nvSpPr>
+          <p:cNvPr id="30" name="TextBox 29"/>
           <p:cNvSpPr txBox="1"/>
           <p:nvPr/>
         </p:nvSpPr>
         <p:spPr>
           <a:xfrm>
-            <a:off x="274320" y="6473952"/>
-            <a:ext cx="11640312" cy="347472"/>
+            <a:off x="594360" y="6455664"/>
+            <a:ext cx="11457432" cy="347472"/>
           </a:xfrm>
           <a:prstGeom prst="rect">
             <a:avLst/>
@@ -15908,7 +16577,7 @@
                 </a:solidFill>
                 <a:latin typeface="Calibri"/>
               </a:rPr>
-              <a:t>Inteligencia Artificial Aplicada a la Producción Pesquera  ·  UTN FRCh  ·  PesquerosEnIA  ·  2026</a:t>
+              <a:t>IA Aplicada a la Produccion Pesquera  |  UTN FRCh  |  PesquerosEnIA  |  2026</a:t>
             </a:r>
           </a:p>
         </p:txBody>
@@ -16275,8 +16944,8 @@
         </p:nvSpPr>
         <p:spPr>
           <a:xfrm>
-            <a:off x="0" y="6446520"/>
-            <a:ext cx="12188952" cy="411480"/>
+            <a:off x="0" y="6419088"/>
+            <a:ext cx="12188952" cy="438912"/>
           </a:xfrm>
           <a:prstGeom prst="rect">
             <a:avLst/>
@@ -16310,16 +16979,40 @@
           </a:p>
         </p:txBody>
       </p:sp>
-      <p:sp>
-        <p:nvSpPr>
-          <p:cNvPr id="9" name="TextBox 8"/>
+      <p:pic>
+        <p:nvPicPr>
+          <p:cNvPr id="9" name="Picture 8" descr="logo_pesqueros_symbol.png"/>
+          <p:cNvPicPr>
+            <a:picLocks noChangeAspect="1"/>
+          </p:cNvPicPr>
+          <p:nvPr/>
+        </p:nvPicPr>
+        <p:blipFill>
+          <a:blip r:embed="rId2"/>
+          <a:stretch>
+            <a:fillRect/>
+          </a:stretch>
+        </p:blipFill>
+        <p:spPr>
+          <a:xfrm>
+            <a:off x="137160" y="6455664"/>
+            <a:ext cx="347472" cy="347472"/>
+          </a:xfrm>
+          <a:prstGeom prst="rect">
+            <a:avLst/>
+          </a:prstGeom>
+        </p:spPr>
+      </p:pic>
+      <p:sp>
+        <p:nvSpPr>
+          <p:cNvPr id="10" name="TextBox 9"/>
           <p:cNvSpPr txBox="1"/>
           <p:nvPr/>
         </p:nvSpPr>
         <p:spPr>
           <a:xfrm>
-            <a:off x="274320" y="6473952"/>
-            <a:ext cx="11640312" cy="347472"/>
+            <a:off x="594360" y="6455664"/>
+            <a:ext cx="11457432" cy="347472"/>
           </a:xfrm>
           <a:prstGeom prst="rect">
             <a:avLst/>
@@ -16340,7 +17033,7 @@
                 </a:solidFill>
                 <a:latin typeface="Calibri"/>
               </a:rPr>
-              <a:t>Inteligencia Artificial Aplicada a la Producción Pesquera  ·  UTN FRCh  ·  PesquerosEnIA  ·  2026</a:t>
+              <a:t>IA Aplicada a la Produccion Pesquera  |  UTN FRCh  |  PesquerosEnIA  |  2026</a:t>
             </a:r>
           </a:p>
         </p:txBody>
@@ -16726,8 +17419,8 @@
         </p:nvSpPr>
         <p:spPr>
           <a:xfrm>
-            <a:off x="0" y="6446520"/>
-            <a:ext cx="12188952" cy="411480"/>
+            <a:off x="0" y="6419088"/>
+            <a:ext cx="12188952" cy="438912"/>
           </a:xfrm>
           <a:prstGeom prst="rect">
             <a:avLst/>
@@ -16761,16 +17454,40 @@
           </a:p>
         </p:txBody>
       </p:sp>
-      <p:sp>
-        <p:nvSpPr>
-          <p:cNvPr id="9" name="TextBox 8"/>
+      <p:pic>
+        <p:nvPicPr>
+          <p:cNvPr id="9" name="Picture 8" descr="logo_pesqueros_symbol.png"/>
+          <p:cNvPicPr>
+            <a:picLocks noChangeAspect="1"/>
+          </p:cNvPicPr>
+          <p:nvPr/>
+        </p:nvPicPr>
+        <p:blipFill>
+          <a:blip r:embed="rId2"/>
+          <a:stretch>
+            <a:fillRect/>
+          </a:stretch>
+        </p:blipFill>
+        <p:spPr>
+          <a:xfrm>
+            <a:off x="137160" y="6455664"/>
+            <a:ext cx="347472" cy="347472"/>
+          </a:xfrm>
+          <a:prstGeom prst="rect">
+            <a:avLst/>
+          </a:prstGeom>
+        </p:spPr>
+      </p:pic>
+      <p:sp>
+        <p:nvSpPr>
+          <p:cNvPr id="10" name="TextBox 9"/>
           <p:cNvSpPr txBox="1"/>
           <p:nvPr/>
         </p:nvSpPr>
         <p:spPr>
           <a:xfrm>
-            <a:off x="274320" y="6473952"/>
-            <a:ext cx="11640312" cy="347472"/>
+            <a:off x="594360" y="6455664"/>
+            <a:ext cx="11457432" cy="347472"/>
           </a:xfrm>
           <a:prstGeom prst="rect">
             <a:avLst/>
@@ -16791,7 +17508,7 @@
                 </a:solidFill>
                 <a:latin typeface="Calibri"/>
               </a:rPr>
-              <a:t>Inteligencia Artificial Aplicada a la Producción Pesquera  ·  UTN FRCh  ·  PesquerosEnIA  ·  2026</a:t>
+              <a:t>IA Aplicada a la Produccion Pesquera  |  UTN FRCh  |  PesquerosEnIA  |  2026</a:t>
             </a:r>
           </a:p>
         </p:txBody>
@@ -17234,8 +17951,8 @@
         </p:nvSpPr>
         <p:spPr>
           <a:xfrm>
-            <a:off x="0" y="6446520"/>
-            <a:ext cx="12188952" cy="411480"/>
+            <a:off x="0" y="6419088"/>
+            <a:ext cx="12188952" cy="438912"/>
           </a:xfrm>
           <a:prstGeom prst="rect">
             <a:avLst/>
@@ -17269,16 +17986,40 @@
           </a:p>
         </p:txBody>
       </p:sp>
-      <p:sp>
-        <p:nvSpPr>
-          <p:cNvPr id="9" name="TextBox 8"/>
+      <p:pic>
+        <p:nvPicPr>
+          <p:cNvPr id="9" name="Picture 8" descr="logo_pesqueros_symbol.png"/>
+          <p:cNvPicPr>
+            <a:picLocks noChangeAspect="1"/>
+          </p:cNvPicPr>
+          <p:nvPr/>
+        </p:nvPicPr>
+        <p:blipFill>
+          <a:blip r:embed="rId2"/>
+          <a:stretch>
+            <a:fillRect/>
+          </a:stretch>
+        </p:blipFill>
+        <p:spPr>
+          <a:xfrm>
+            <a:off x="137160" y="6455664"/>
+            <a:ext cx="347472" cy="347472"/>
+          </a:xfrm>
+          <a:prstGeom prst="rect">
+            <a:avLst/>
+          </a:prstGeom>
+        </p:spPr>
+      </p:pic>
+      <p:sp>
+        <p:nvSpPr>
+          <p:cNvPr id="10" name="TextBox 9"/>
           <p:cNvSpPr txBox="1"/>
           <p:nvPr/>
         </p:nvSpPr>
         <p:spPr>
           <a:xfrm>
-            <a:off x="274320" y="6473952"/>
-            <a:ext cx="11640312" cy="347472"/>
+            <a:off x="594360" y="6455664"/>
+            <a:ext cx="11457432" cy="347472"/>
           </a:xfrm>
           <a:prstGeom prst="rect">
             <a:avLst/>
@@ -17299,7 +18040,7 @@
                 </a:solidFill>
                 <a:latin typeface="Calibri"/>
               </a:rPr>
-              <a:t>Inteligencia Artificial Aplicada a la Producción Pesquera  ·  UTN FRCh  ·  PesquerosEnIA  ·  2026</a:t>
+              <a:t>IA Aplicada a la Produccion Pesquera  |  UTN FRCh  |  PesquerosEnIA  |  2026</a:t>
             </a:r>
           </a:p>
         </p:txBody>
